--- a/docs/energy-rag-report_20261011_155700.pptx
+++ b/docs/energy-rag-report_20261011_155700.pptx
@@ -8,6 +8,7 @@
     <p:sldId id="256" r:id="rId7"/>
     <p:sldId id="257" r:id="rId8"/>
     <p:sldId id="258" r:id="rId9"/>
+    <p:sldId id="259" r:id="rId10"/>
   </p:sldIdLst>
   <p:sldSz cx="12192000" cy="6858000" type="screen16x9"/>
   <p:notesSz cx="6858000" cy="9144000"/>
@@ -600,7 +601,7 @@
 </file>
 
 <file path=ppt/slides/slide1.xml><?xml version="1.0" encoding="utf-8"?>
-<p:sld xmlns:a="http://schemas.openxmlformats.org/drawingml/2006/main" xmlns:r="http://schemas.openxmlformats.org/officeDocument/2006/relationships" xmlns:p="http://schemas.openxmlformats.org/presentationml/2006/main">
+<p:sld xmlns:a="http://schemas.openxmlformats.org/drawingml/2006/main" xmlns:p="http://schemas.openxmlformats.org/presentationml/2006/main" xmlns:p14="http://schemas.microsoft.com/office/powerpoint/2010/main">
   <p:cSld>
     <p:bg>
       <p:bgPr>
@@ -1907,13 +1908,13 @@
         <p:sp>
           <p:nvSpPr>
             <p:cNvPr id="38" name="TextBox 38"/>
-            <p:cNvSpPr txBox="1"/>
-            <p:nvPr/>
-          </p:nvSpPr>
-          <p:spPr>
-            <a:xfrm>
-              <a:off x="11035132" y="6438900"/>
-              <a:ext cx="553364" cy="234696"/>
+            <p:cNvSpPr/>
+            <p:nvPr/>
+          </p:nvSpPr>
+          <p:spPr>
+            <a:xfrm>
+              <a:off x="11035094" y="6438900"/>
+              <a:ext cx="553402" cy="234696"/>
             </a:xfrm>
             <a:prstGeom prst="rect">
               <a:avLst/>
@@ -1925,21 +1926,21 @@
           </p:spPr>
           <p:txBody>
             <a:bodyPr wrap="none" lIns="0" tIns="0" rIns="0" bIns="0" anchor="t" anchorCtr="0">
-              <a:spAutoFit/>
+              <a:noAutofit/>
             </a:bodyPr>
             <a:lstStyle/>
             <a:p>
               <a:pPr algn="r"/>
               <a:r>
-                <a:rPr lang="zh-CN" sz="1200" dirty="0">
-                  <a:solidFill>
-                    <a:schemeClr val="accent5"/>
-                  </a:solidFill>
-                  <a:latin typeface="+mn-lt"/>
-                  <a:ea typeface="+mn-ea"/>
-                  <a:cs typeface="+mn-cs"/>
-                </a:rPr>
-                <a:t>01 / 03</a:t>
+                <a:rPr lang="en-US" sz="1200" dirty="0">
+                  <a:solidFill>
+                    <a:srgbClr val="5A6472"/>
+                  </a:solidFill>
+                  <a:latin typeface="Arial"/>
+                  <a:ea typeface="Arial"/>
+                  <a:cs typeface="Arial"/>
+                </a:rPr>
+                <a:t>01 / 04</a:t>
               </a:r>
             </a:p>
           </p:txBody>
@@ -1950,14 +1951,14 @@
   <p:clrMapOvr>
     <a:masterClrMapping/>
   </p:clrMapOvr>
-  <p:transition xmlns:p14="http://schemas.microsoft.com/office/powerpoint/2010/main" p14:dur="400">
+  <p:transition p14:dur="400">
     <p:fade/>
   </p:transition>
 </p:sld>
 </file>
 
 <file path=ppt/slides/slide2.xml><?xml version="1.0" encoding="utf-8"?>
-<p:sld xmlns:a="http://schemas.openxmlformats.org/drawingml/2006/main" xmlns:r="http://schemas.openxmlformats.org/officeDocument/2006/relationships" xmlns:p="http://schemas.openxmlformats.org/presentationml/2006/main">
+<p:sld xmlns:a="http://schemas.openxmlformats.org/drawingml/2006/main" xmlns:p="http://schemas.openxmlformats.org/presentationml/2006/main" xmlns:p14="http://schemas.microsoft.com/office/powerpoint/2010/main">
   <p:cSld>
     <p:bg>
       <p:bgPr>
@@ -4010,13 +4011,13 @@
         <p:sp>
           <p:nvSpPr>
             <p:cNvPr id="56" name="TextBox 56"/>
-            <p:cNvSpPr txBox="1"/>
-            <p:nvPr/>
-          </p:nvSpPr>
-          <p:spPr>
-            <a:xfrm>
-              <a:off x="11035132" y="6438900"/>
-              <a:ext cx="553364" cy="234696"/>
+            <p:cNvSpPr/>
+            <p:nvPr/>
+          </p:nvSpPr>
+          <p:spPr>
+            <a:xfrm>
+              <a:off x="11035094" y="6438900"/>
+              <a:ext cx="553402" cy="234696"/>
             </a:xfrm>
             <a:prstGeom prst="rect">
               <a:avLst/>
@@ -4028,21 +4029,21 @@
           </p:spPr>
           <p:txBody>
             <a:bodyPr wrap="none" lIns="0" tIns="0" rIns="0" bIns="0" anchor="t" anchorCtr="0">
-              <a:spAutoFit/>
+              <a:noAutofit/>
             </a:bodyPr>
             <a:lstStyle/>
             <a:p>
               <a:pPr algn="r"/>
               <a:r>
-                <a:rPr lang="zh-CN" sz="1200" dirty="0">
-                  <a:solidFill>
-                    <a:schemeClr val="accent5"/>
-                  </a:solidFill>
-                  <a:latin typeface="+mn-lt"/>
-                  <a:ea typeface="+mn-ea"/>
-                  <a:cs typeface="+mn-cs"/>
-                </a:rPr>
-                <a:t>02 / 03</a:t>
+                <a:rPr lang="en-US" sz="1200" dirty="0">
+                  <a:solidFill>
+                    <a:srgbClr val="5A6472"/>
+                  </a:solidFill>
+                  <a:latin typeface="Arial"/>
+                  <a:ea typeface="Arial"/>
+                  <a:cs typeface="Arial"/>
+                </a:rPr>
+                <a:t>02 / 04</a:t>
               </a:r>
             </a:p>
           </p:txBody>
@@ -4053,14 +4054,14 @@
   <p:clrMapOvr>
     <a:masterClrMapping/>
   </p:clrMapOvr>
-  <p:transition xmlns:p14="http://schemas.microsoft.com/office/powerpoint/2010/main" p14:dur="400">
+  <p:transition p14:dur="400">
     <p:fade/>
   </p:transition>
 </p:sld>
 </file>
 
 <file path=ppt/slides/slide3.xml><?xml version="1.0" encoding="utf-8"?>
-<p:sld xmlns:a="http://schemas.openxmlformats.org/drawingml/2006/main" xmlns:r="http://schemas.openxmlformats.org/officeDocument/2006/relationships" xmlns:p="http://schemas.openxmlformats.org/presentationml/2006/main">
+<p:sld xmlns:a="http://schemas.openxmlformats.org/drawingml/2006/main" xmlns:p="http://schemas.openxmlformats.org/presentationml/2006/main" xmlns:p14="http://schemas.microsoft.com/office/powerpoint/2010/main">
   <p:cSld>
     <p:bg>
       <p:bgPr>
@@ -6621,13 +6622,2035 @@
         <p:sp>
           <p:nvSpPr>
             <p:cNvPr id="69" name="TextBox 69"/>
+            <p:cNvSpPr/>
+            <p:nvPr/>
+          </p:nvSpPr>
+          <p:spPr>
+            <a:xfrm>
+              <a:off x="11035094" y="6438900"/>
+              <a:ext cx="553402" cy="234696"/>
+            </a:xfrm>
+            <a:prstGeom prst="rect">
+              <a:avLst/>
+            </a:prstGeom>
+            <a:noFill/>
+            <a:ln>
+              <a:noFill/>
+            </a:ln>
+          </p:spPr>
+          <p:txBody>
+            <a:bodyPr wrap="none" lIns="0" tIns="0" rIns="0" bIns="0" anchor="t" anchorCtr="0">
+              <a:noAutofit/>
+            </a:bodyPr>
+            <a:lstStyle/>
+            <a:p>
+              <a:pPr algn="r"/>
+              <a:r>
+                <a:rPr lang="en-US" sz="1200" dirty="0">
+                  <a:solidFill>
+                    <a:srgbClr val="5A6472"/>
+                  </a:solidFill>
+                  <a:latin typeface="Arial"/>
+                  <a:ea typeface="Arial"/>
+                  <a:cs typeface="Arial"/>
+                </a:rPr>
+                <a:t>03 / 04</a:t>
+              </a:r>
+            </a:p>
+          </p:txBody>
+        </p:sp>
+      </p:grpSp>
+    </p:spTree>
+  </p:cSld>
+  <p:clrMapOvr>
+    <a:masterClrMapping/>
+  </p:clrMapOvr>
+  <p:transition p14:dur="400">
+    <p:fade/>
+  </p:transition>
+</p:sld>
+</file>
+
+<file path=ppt/slides/slide4.xml><?xml version="1.0" encoding="utf-8"?>
+<p:sld xmlns:a="http://schemas.openxmlformats.org/drawingml/2006/main" xmlns:p="http://schemas.openxmlformats.org/presentationml/2006/main" xmlns:p14="http://schemas.microsoft.com/office/powerpoint/2010/main">
+  <p:cSld>
+    <p:bg>
+      <p:bgPr>
+        <a:solidFill>
+          <a:schemeClr val="lt1"/>
+        </a:solidFill>
+        <a:effectLst/>
+      </p:bgPr>
+    </p:bg>
+    <p:spTree>
+      <p:nvGrpSpPr>
+        <p:cNvPr id="1" name=""/>
+        <p:cNvGrpSpPr/>
+        <p:nvPr/>
+      </p:nvGrpSpPr>
+      <p:grpSpPr>
+        <a:xfrm>
+          <a:off x="0" y="0"/>
+          <a:ext cx="0" cy="0"/>
+          <a:chOff x="0" y="0"/>
+          <a:chExt cx="0" cy="0"/>
+        </a:xfrm>
+      </p:grpSpPr>
+      <p:grpSp>
+        <p:nvGrpSpPr>
+          <p:cNvPr id="5" name="header"/>
+          <p:cNvGrpSpPr/>
+          <p:nvPr/>
+        </p:nvGrpSpPr>
+        <p:grpSpPr>
+          <a:xfrm>
+            <a:off x="609600" y="660400"/>
+            <a:ext cx="8549640" cy="897255"/>
+            <a:chOff x="609600" y="660400"/>
+            <a:chExt cx="8549640" cy="897255"/>
+          </a:xfrm>
+        </p:grpSpPr>
+        <p:sp>
+          <p:nvSpPr>
+            <p:cNvPr id="2" name="Freeform 2"/>
+            <p:cNvSpPr/>
+            <p:nvPr/>
+          </p:nvSpPr>
+          <p:spPr>
+            <a:xfrm>
+              <a:off x="609600" y="723900"/>
+              <a:ext cx="38100" cy="609600"/>
+            </a:xfrm>
+            <a:custGeom>
+              <a:avLst/>
+              <a:gdLst/>
+              <a:ahLst/>
+              <a:cxnLst/>
+              <a:rect l="l" t="t" r="r" b="b"/>
+              <a:pathLst>
+                <a:path w="38100" h="609600">
+                  <a:moveTo>
+                    <a:pt x="0" y="0"/>
+                  </a:moveTo>
+                  <a:lnTo>
+                    <a:pt x="38100" y="0"/>
+                  </a:lnTo>
+                  <a:lnTo>
+                    <a:pt x="38100" y="609600"/>
+                  </a:lnTo>
+                  <a:lnTo>
+                    <a:pt x="0" y="609600"/>
+                  </a:lnTo>
+                  <a:close/>
+                </a:path>
+              </a:pathLst>
+            </a:custGeom>
+            <a:solidFill>
+              <a:srgbClr val="0E7C66"/>
+            </a:solidFill>
+            <a:ln>
+              <a:noFill/>
+            </a:ln>
+          </p:spPr>
+        </p:sp>
+        <p:sp>
+          <p:nvSpPr>
+            <p:cNvPr id="3" name="TextBox 3"/>
             <p:cNvSpPr txBox="1"/>
             <p:nvPr/>
           </p:nvSpPr>
           <p:spPr>
             <a:xfrm>
-              <a:off x="11035132" y="6438900"/>
-              <a:ext cx="553364" cy="234696"/>
+              <a:off x="807720" y="660400"/>
+              <a:ext cx="3560288" cy="586740"/>
+            </a:xfrm>
+            <a:prstGeom prst="rect">
+              <a:avLst/>
+            </a:prstGeom>
+            <a:noFill/>
+            <a:ln>
+              <a:noFill/>
+            </a:ln>
+          </p:spPr>
+          <p:txBody>
+            <a:bodyPr wrap="none" lIns="0" tIns="0" rIns="0" bIns="0" anchor="t" anchorCtr="0">
+              <a:spAutoFit/>
+            </a:bodyPr>
+            <a:lstStyle/>
+            <a:p>
+              <a:pPr algn="l"/>
+              <a:r>
+                <a:rPr lang="zh-CN" sz="3000" dirty="0">
+                  <a:solidFill>
+                    <a:srgbClr val="0B3D66"/>
+                  </a:solidFill>
+                  <a:latin typeface="Times New Roman"/>
+                  <a:ea typeface="SimSun"/>
+                  <a:cs typeface="Times New Roman"/>
+                </a:rPr>
+                <a:t>Agentic RAG 简介</a:t>
+              </a:r>
+            </a:p>
+          </p:txBody>
+        </p:sp>
+        <p:sp>
+          <p:nvSpPr>
+            <p:cNvPr id="4" name="TextBox 4"/>
+            <p:cNvSpPr txBox="1"/>
+            <p:nvPr/>
+          </p:nvSpPr>
+          <p:spPr>
+            <a:xfrm>
+              <a:off x="815340" y="1117600"/>
+              <a:ext cx="8343900" cy="440055"/>
+            </a:xfrm>
+            <a:prstGeom prst="rect">
+              <a:avLst/>
+            </a:prstGeom>
+            <a:noFill/>
+            <a:ln>
+              <a:noFill/>
+            </a:ln>
+          </p:spPr>
+          <p:txBody>
+            <a:bodyPr wrap="none" lIns="0" tIns="0" rIns="0" bIns="0" anchor="t" anchorCtr="0">
+              <a:spAutoFit/>
+            </a:bodyPr>
+            <a:lstStyle/>
+            <a:p>
+              <a:pPr algn="l"/>
+              <a:r>
+                <a:rPr lang="zh-CN" sz="2250" dirty="0">
+                  <a:solidFill>
+                    <a:srgbClr val="1B1F24"/>
+                  </a:solidFill>
+                  <a:latin typeface="Times New Roman"/>
+                  <a:ea typeface="SimSun"/>
+                  <a:cs typeface="Times New Roman"/>
+                </a:rPr>
+                <a:t>在检索问答之上，加入智能体的规划、工具调用与反思闭环</a:t>
+              </a:r>
+            </a:p>
+          </p:txBody>
+        </p:sp>
+      </p:grpSp>
+      <p:grpSp>
+        <p:nvGrpSpPr>
+          <p:cNvPr id="43" name="agentic-loop"/>
+          <p:cNvGrpSpPr/>
+          <p:nvPr/>
+        </p:nvGrpSpPr>
+        <p:grpSpPr>
+          <a:xfrm>
+            <a:off x="609600" y="1714500"/>
+            <a:ext cx="10972800" cy="1907159"/>
+            <a:chOff x="609600" y="1714500"/>
+            <a:chExt cx="10972800" cy="1907159"/>
+          </a:xfrm>
+        </p:grpSpPr>
+        <p:grpSp>
+          <p:nvGrpSpPr>
+            <p:cNvPr id="12" name="loop-plan"/>
+            <p:cNvGrpSpPr/>
+            <p:nvPr/>
+          </p:nvGrpSpPr>
+          <p:grpSpPr>
+            <a:xfrm>
+              <a:off x="609600" y="1714500"/>
+              <a:ext cx="2286000" cy="1333500"/>
+              <a:chOff x="609600" y="1714500"/>
+              <a:chExt cx="2286000" cy="1333500"/>
+            </a:xfrm>
+          </p:grpSpPr>
+          <p:sp>
+            <p:nvSpPr>
+              <p:cNvPr id="6" name="Rectangle 6"/>
+              <p:cNvSpPr/>
+              <p:nvPr/>
+            </p:nvSpPr>
+            <p:spPr>
+              <a:xfrm>
+                <a:off x="609600" y="1714500"/>
+                <a:ext cx="2286000" cy="1333500"/>
+              </a:xfrm>
+              <a:prstGeom prst="roundRect">
+                <a:avLst>
+                  <a:gd name="adj" fmla="val 2857"/>
+                </a:avLst>
+              </a:prstGeom>
+              <a:solidFill>
+                <a:srgbClr val="F4F6F8"/>
+              </a:solidFill>
+              <a:ln>
+                <a:noFill/>
+              </a:ln>
+            </p:spPr>
+          </p:sp>
+          <p:sp>
+            <p:nvSpPr>
+              <p:cNvPr id="7" name="Freeform 7"/>
+              <p:cNvSpPr/>
+              <p:nvPr/>
+            </p:nvSpPr>
+            <p:spPr>
+              <a:xfrm>
+                <a:off x="609600" y="1714500"/>
+                <a:ext cx="38100" cy="1333500"/>
+              </a:xfrm>
+              <a:custGeom>
+                <a:avLst/>
+                <a:gdLst/>
+                <a:ahLst/>
+                <a:cxnLst/>
+                <a:rect l="l" t="t" r="r" b="b"/>
+                <a:pathLst>
+                  <a:path w="38100" h="1333500">
+                    <a:moveTo>
+                      <a:pt x="0" y="0"/>
+                    </a:moveTo>
+                    <a:lnTo>
+                      <a:pt x="38100" y="0"/>
+                    </a:lnTo>
+                    <a:lnTo>
+                      <a:pt x="38100" y="1333500"/>
+                    </a:lnTo>
+                    <a:lnTo>
+                      <a:pt x="0" y="1333500"/>
+                    </a:lnTo>
+                    <a:close/>
+                  </a:path>
+                </a:pathLst>
+              </a:custGeom>
+              <a:solidFill>
+                <a:srgbClr val="0E7C66"/>
+              </a:solidFill>
+              <a:ln>
+                <a:noFill/>
+              </a:ln>
+            </p:spPr>
+          </p:sp>
+          <p:sp>
+            <p:nvSpPr>
+              <p:cNvPr id="8" name="Ellipse 8"/>
+              <p:cNvSpPr/>
+              <p:nvPr/>
+            </p:nvSpPr>
+            <p:spPr>
+              <a:xfrm>
+                <a:off x="2562225" y="1838325"/>
+                <a:ext cx="209550" cy="209550"/>
+              </a:xfrm>
+              <a:prstGeom prst="ellipse">
+                <a:avLst/>
+              </a:prstGeom>
+              <a:solidFill>
+                <a:srgbClr val="0E7C66"/>
+              </a:solidFill>
+              <a:ln>
+                <a:noFill/>
+              </a:ln>
+            </p:spPr>
+          </p:sp>
+          <p:sp>
+            <p:nvSpPr>
+              <p:cNvPr id="9" name="TextBox 9"/>
+              <p:cNvSpPr txBox="1"/>
+              <p:nvPr/>
+            </p:nvSpPr>
+            <p:spPr>
+              <a:xfrm>
+                <a:off x="2619355" y="1851025"/>
+                <a:ext cx="95291" cy="220028"/>
+              </a:xfrm>
+              <a:prstGeom prst="rect">
+                <a:avLst/>
+              </a:prstGeom>
+              <a:noFill/>
+              <a:ln>
+                <a:noFill/>
+              </a:ln>
+            </p:spPr>
+            <p:txBody>
+              <a:bodyPr wrap="none" lIns="0" tIns="0" rIns="0" bIns="0" anchor="t" anchorCtr="0">
+                <a:spAutoFit/>
+              </a:bodyPr>
+              <a:lstStyle/>
+              <a:p>
+                <a:pPr algn="ctr"/>
+                <a:r>
+                  <a:rPr lang="en-US" sz="1120" dirty="0">
+                    <a:solidFill>
+                      <a:srgbClr val="FFFFFF"/>
+                    </a:solidFill>
+                    <a:latin typeface="Arial"/>
+                    <a:ea typeface="Arial"/>
+                    <a:cs typeface="Arial"/>
+                  </a:rPr>
+                  <a:t>1</a:t>
+                </a:r>
+              </a:p>
+            </p:txBody>
+          </p:sp>
+          <p:sp>
+            <p:nvSpPr>
+              <p:cNvPr id="10" name="TextBox 10"/>
+              <p:cNvSpPr txBox="1"/>
+              <p:nvPr/>
+            </p:nvSpPr>
+            <p:spPr>
+              <a:xfrm>
+                <a:off x="830580" y="2032000"/>
+                <a:ext cx="419100" cy="293370"/>
+              </a:xfrm>
+              <a:prstGeom prst="rect">
+                <a:avLst/>
+              </a:prstGeom>
+              <a:noFill/>
+              <a:ln>
+                <a:noFill/>
+              </a:ln>
+            </p:spPr>
+            <p:txBody>
+              <a:bodyPr wrap="none" lIns="0" tIns="0" rIns="0" bIns="0" anchor="t" anchorCtr="0">
+                <a:spAutoFit/>
+              </a:bodyPr>
+              <a:lstStyle/>
+              <a:p>
+                <a:pPr algn="l"/>
+                <a:r>
+                  <a:rPr lang="zh-CN" sz="1500" b="1" dirty="0">
+                    <a:solidFill>
+                      <a:srgbClr val="0B3D66"/>
+                    </a:solidFill>
+                    <a:latin typeface="Arial"/>
+                    <a:ea typeface="Microsoft YaHei"/>
+                    <a:cs typeface="Arial"/>
+                  </a:rPr>
+                  <a:t>规划</a:t>
+                </a:r>
+              </a:p>
+            </p:txBody>
+          </p:sp>
+          <p:sp>
+            <p:nvSpPr>
+              <p:cNvPr id="11" name="TextBox 11"/>
+              <p:cNvSpPr txBox="1"/>
+              <p:nvPr/>
+            </p:nvSpPr>
+            <p:spPr>
+              <a:xfrm>
+                <a:off x="832485" y="2470150"/>
+                <a:ext cx="1669948" cy="220028"/>
+              </a:xfrm>
+              <a:prstGeom prst="rect">
+                <a:avLst/>
+              </a:prstGeom>
+              <a:noFill/>
+              <a:ln>
+                <a:noFill/>
+              </a:ln>
+            </p:spPr>
+            <p:txBody>
+              <a:bodyPr wrap="none" lIns="0" tIns="0" rIns="0" bIns="0" anchor="t" anchorCtr="0">
+                <a:spAutoFit/>
+              </a:bodyPr>
+              <a:lstStyle/>
+              <a:p>
+                <a:pPr algn="l"/>
+                <a:r>
+                  <a:rPr lang="zh-CN" sz="1120" dirty="0">
+                    <a:solidFill>
+                      <a:srgbClr val="5A6472"/>
+                    </a:solidFill>
+                    <a:latin typeface="Arial"/>
+                    <a:ea typeface="Microsoft YaHei"/>
+                    <a:cs typeface="Arial"/>
+                  </a:rPr>
+                  <a:t>拆解问题，制定检索策略</a:t>
+                </a:r>
+              </a:p>
+            </p:txBody>
+          </p:sp>
+        </p:grpSp>
+        <p:grpSp>
+          <p:nvGrpSpPr>
+            <p:cNvPr id="19" name="loop-retrieve"/>
+            <p:cNvGrpSpPr/>
+            <p:nvPr/>
+          </p:nvGrpSpPr>
+          <p:grpSpPr>
+            <a:xfrm>
+              <a:off x="3505200" y="1714500"/>
+              <a:ext cx="2286000" cy="1333500"/>
+              <a:chOff x="3505200" y="1714500"/>
+              <a:chExt cx="2286000" cy="1333500"/>
+            </a:xfrm>
+          </p:grpSpPr>
+          <p:sp>
+            <p:nvSpPr>
+              <p:cNvPr id="13" name="Rectangle 13"/>
+              <p:cNvSpPr/>
+              <p:nvPr/>
+            </p:nvSpPr>
+            <p:spPr>
+              <a:xfrm>
+                <a:off x="3505200" y="1714500"/>
+                <a:ext cx="2286000" cy="1333500"/>
+              </a:xfrm>
+              <a:prstGeom prst="roundRect">
+                <a:avLst>
+                  <a:gd name="adj" fmla="val 2857"/>
+                </a:avLst>
+              </a:prstGeom>
+              <a:solidFill>
+                <a:srgbClr val="F4F6F8"/>
+              </a:solidFill>
+              <a:ln>
+                <a:noFill/>
+              </a:ln>
+            </p:spPr>
+          </p:sp>
+          <p:sp>
+            <p:nvSpPr>
+              <p:cNvPr id="14" name="Freeform 14"/>
+              <p:cNvSpPr/>
+              <p:nvPr/>
+            </p:nvSpPr>
+            <p:spPr>
+              <a:xfrm>
+                <a:off x="3505200" y="1714500"/>
+                <a:ext cx="38100" cy="1333500"/>
+              </a:xfrm>
+              <a:custGeom>
+                <a:avLst/>
+                <a:gdLst/>
+                <a:ahLst/>
+                <a:cxnLst/>
+                <a:rect l="l" t="t" r="r" b="b"/>
+                <a:pathLst>
+                  <a:path w="38100" h="1333500">
+                    <a:moveTo>
+                      <a:pt x="0" y="0"/>
+                    </a:moveTo>
+                    <a:lnTo>
+                      <a:pt x="38100" y="0"/>
+                    </a:lnTo>
+                    <a:lnTo>
+                      <a:pt x="38100" y="1333500"/>
+                    </a:lnTo>
+                    <a:lnTo>
+                      <a:pt x="0" y="1333500"/>
+                    </a:lnTo>
+                    <a:close/>
+                  </a:path>
+                </a:pathLst>
+              </a:custGeom>
+              <a:solidFill>
+                <a:srgbClr val="0E7C66"/>
+              </a:solidFill>
+              <a:ln>
+                <a:noFill/>
+              </a:ln>
+            </p:spPr>
+          </p:sp>
+          <p:sp>
+            <p:nvSpPr>
+              <p:cNvPr id="15" name="Ellipse 15"/>
+              <p:cNvSpPr/>
+              <p:nvPr/>
+            </p:nvSpPr>
+            <p:spPr>
+              <a:xfrm>
+                <a:off x="5457825" y="1838325"/>
+                <a:ext cx="209550" cy="209550"/>
+              </a:xfrm>
+              <a:prstGeom prst="ellipse">
+                <a:avLst/>
+              </a:prstGeom>
+              <a:solidFill>
+                <a:srgbClr val="0E7C66"/>
+              </a:solidFill>
+              <a:ln>
+                <a:noFill/>
+              </a:ln>
+            </p:spPr>
+          </p:sp>
+          <p:sp>
+            <p:nvSpPr>
+              <p:cNvPr id="16" name="TextBox 16"/>
+              <p:cNvSpPr txBox="1"/>
+              <p:nvPr/>
+            </p:nvSpPr>
+            <p:spPr>
+              <a:xfrm>
+                <a:off x="5514955" y="1851025"/>
+                <a:ext cx="95291" cy="220028"/>
+              </a:xfrm>
+              <a:prstGeom prst="rect">
+                <a:avLst/>
+              </a:prstGeom>
+              <a:noFill/>
+              <a:ln>
+                <a:noFill/>
+              </a:ln>
+            </p:spPr>
+            <p:txBody>
+              <a:bodyPr wrap="none" lIns="0" tIns="0" rIns="0" bIns="0" anchor="t" anchorCtr="0">
+                <a:spAutoFit/>
+              </a:bodyPr>
+              <a:lstStyle/>
+              <a:p>
+                <a:pPr algn="ctr"/>
+                <a:r>
+                  <a:rPr lang="en-US" sz="1120" dirty="0">
+                    <a:solidFill>
+                      <a:srgbClr val="FFFFFF"/>
+                    </a:solidFill>
+                    <a:latin typeface="Arial"/>
+                    <a:ea typeface="Arial"/>
+                    <a:cs typeface="Arial"/>
+                  </a:rPr>
+                  <a:t>2</a:t>
+                </a:r>
+              </a:p>
+            </p:txBody>
+          </p:sp>
+          <p:sp>
+            <p:nvSpPr>
+              <p:cNvPr id="17" name="TextBox 17"/>
+              <p:cNvSpPr txBox="1"/>
+              <p:nvPr/>
+            </p:nvSpPr>
+            <p:spPr>
+              <a:xfrm>
+                <a:off x="3726180" y="2032000"/>
+                <a:ext cx="419100" cy="293370"/>
+              </a:xfrm>
+              <a:prstGeom prst="rect">
+                <a:avLst/>
+              </a:prstGeom>
+              <a:noFill/>
+              <a:ln>
+                <a:noFill/>
+              </a:ln>
+            </p:spPr>
+            <p:txBody>
+              <a:bodyPr wrap="none" lIns="0" tIns="0" rIns="0" bIns="0" anchor="t" anchorCtr="0">
+                <a:spAutoFit/>
+              </a:bodyPr>
+              <a:lstStyle/>
+              <a:p>
+                <a:pPr algn="l"/>
+                <a:r>
+                  <a:rPr lang="zh-CN" sz="1500" b="1" dirty="0">
+                    <a:solidFill>
+                      <a:srgbClr val="0B3D66"/>
+                    </a:solidFill>
+                    <a:latin typeface="Arial"/>
+                    <a:ea typeface="Microsoft YaHei"/>
+                    <a:cs typeface="Arial"/>
+                  </a:rPr>
+                  <a:t>检索</a:t>
+                </a:r>
+              </a:p>
+            </p:txBody>
+          </p:sp>
+          <p:sp>
+            <p:nvSpPr>
+              <p:cNvPr id="18" name="TextBox 18"/>
+              <p:cNvSpPr txBox="1"/>
+              <p:nvPr/>
+            </p:nvSpPr>
+            <p:spPr>
+              <a:xfrm>
+                <a:off x="3728085" y="2470150"/>
+                <a:ext cx="1066851" cy="220028"/>
+              </a:xfrm>
+              <a:prstGeom prst="rect">
+                <a:avLst/>
+              </a:prstGeom>
+              <a:noFill/>
+              <a:ln>
+                <a:noFill/>
+              </a:ln>
+            </p:spPr>
+            <p:txBody>
+              <a:bodyPr wrap="none" lIns="0" tIns="0" rIns="0" bIns="0" anchor="t" anchorCtr="0">
+                <a:spAutoFit/>
+              </a:bodyPr>
+              <a:lstStyle/>
+              <a:p>
+                <a:pPr algn="l"/>
+                <a:r>
+                  <a:rPr lang="zh-CN" sz="1120" dirty="0">
+                    <a:solidFill>
+                      <a:srgbClr val="5A6472"/>
+                    </a:solidFill>
+                    <a:latin typeface="Arial"/>
+                    <a:ea typeface="Microsoft YaHei"/>
+                    <a:cs typeface="Arial"/>
+                  </a:rPr>
+                  <a:t>多轮检索知识库</a:t>
+                </a:r>
+              </a:p>
+            </p:txBody>
+          </p:sp>
+        </p:grpSp>
+        <p:grpSp>
+          <p:nvGrpSpPr>
+            <p:cNvPr id="26" name="loop-tools"/>
+            <p:cNvGrpSpPr/>
+            <p:nvPr/>
+          </p:nvGrpSpPr>
+          <p:grpSpPr>
+            <a:xfrm>
+              <a:off x="6400800" y="1714500"/>
+              <a:ext cx="2286000" cy="1333500"/>
+              <a:chOff x="6400800" y="1714500"/>
+              <a:chExt cx="2286000" cy="1333500"/>
+            </a:xfrm>
+          </p:grpSpPr>
+          <p:sp>
+            <p:nvSpPr>
+              <p:cNvPr id="20" name="Rectangle 20"/>
+              <p:cNvSpPr/>
+              <p:nvPr/>
+            </p:nvSpPr>
+            <p:spPr>
+              <a:xfrm>
+                <a:off x="6400800" y="1714500"/>
+                <a:ext cx="2286000" cy="1333500"/>
+              </a:xfrm>
+              <a:prstGeom prst="roundRect">
+                <a:avLst>
+                  <a:gd name="adj" fmla="val 2857"/>
+                </a:avLst>
+              </a:prstGeom>
+              <a:solidFill>
+                <a:srgbClr val="F4F6F8"/>
+              </a:solidFill>
+              <a:ln>
+                <a:noFill/>
+              </a:ln>
+            </p:spPr>
+          </p:sp>
+          <p:sp>
+            <p:nvSpPr>
+              <p:cNvPr id="21" name="Freeform 21"/>
+              <p:cNvSpPr/>
+              <p:nvPr/>
+            </p:nvSpPr>
+            <p:spPr>
+              <a:xfrm>
+                <a:off x="6400800" y="1714500"/>
+                <a:ext cx="38100" cy="1333500"/>
+              </a:xfrm>
+              <a:custGeom>
+                <a:avLst/>
+                <a:gdLst/>
+                <a:ahLst/>
+                <a:cxnLst/>
+                <a:rect l="l" t="t" r="r" b="b"/>
+                <a:pathLst>
+                  <a:path w="38100" h="1333500">
+                    <a:moveTo>
+                      <a:pt x="0" y="0"/>
+                    </a:moveTo>
+                    <a:lnTo>
+                      <a:pt x="38100" y="0"/>
+                    </a:lnTo>
+                    <a:lnTo>
+                      <a:pt x="38100" y="1333500"/>
+                    </a:lnTo>
+                    <a:lnTo>
+                      <a:pt x="0" y="1333500"/>
+                    </a:lnTo>
+                    <a:close/>
+                  </a:path>
+                </a:pathLst>
+              </a:custGeom>
+              <a:solidFill>
+                <a:srgbClr val="0E7C66"/>
+              </a:solidFill>
+              <a:ln>
+                <a:noFill/>
+              </a:ln>
+            </p:spPr>
+          </p:sp>
+          <p:sp>
+            <p:nvSpPr>
+              <p:cNvPr id="22" name="Ellipse 22"/>
+              <p:cNvSpPr/>
+              <p:nvPr/>
+            </p:nvSpPr>
+            <p:spPr>
+              <a:xfrm>
+                <a:off x="8353425" y="1838325"/>
+                <a:ext cx="209550" cy="209550"/>
+              </a:xfrm>
+              <a:prstGeom prst="ellipse">
+                <a:avLst/>
+              </a:prstGeom>
+              <a:solidFill>
+                <a:srgbClr val="0E7C66"/>
+              </a:solidFill>
+              <a:ln>
+                <a:noFill/>
+              </a:ln>
+            </p:spPr>
+          </p:sp>
+          <p:sp>
+            <p:nvSpPr>
+              <p:cNvPr id="23" name="TextBox 23"/>
+              <p:cNvSpPr txBox="1"/>
+              <p:nvPr/>
+            </p:nvSpPr>
+            <p:spPr>
+              <a:xfrm>
+                <a:off x="8410555" y="1851025"/>
+                <a:ext cx="95291" cy="220028"/>
+              </a:xfrm>
+              <a:prstGeom prst="rect">
+                <a:avLst/>
+              </a:prstGeom>
+              <a:noFill/>
+              <a:ln>
+                <a:noFill/>
+              </a:ln>
+            </p:spPr>
+            <p:txBody>
+              <a:bodyPr wrap="none" lIns="0" tIns="0" rIns="0" bIns="0" anchor="t" anchorCtr="0">
+                <a:spAutoFit/>
+              </a:bodyPr>
+              <a:lstStyle/>
+              <a:p>
+                <a:pPr algn="ctr"/>
+                <a:r>
+                  <a:rPr lang="en-US" sz="1120" dirty="0">
+                    <a:solidFill>
+                      <a:srgbClr val="FFFFFF"/>
+                    </a:solidFill>
+                    <a:latin typeface="Arial"/>
+                    <a:ea typeface="Arial"/>
+                    <a:cs typeface="Arial"/>
+                  </a:rPr>
+                  <a:t>3</a:t>
+                </a:r>
+              </a:p>
+            </p:txBody>
+          </p:sp>
+          <p:sp>
+            <p:nvSpPr>
+              <p:cNvPr id="24" name="TextBox 24"/>
+              <p:cNvSpPr txBox="1"/>
+              <p:nvPr/>
+            </p:nvSpPr>
+            <p:spPr>
+              <a:xfrm>
+                <a:off x="6621780" y="2032000"/>
+                <a:ext cx="822960" cy="293370"/>
+              </a:xfrm>
+              <a:prstGeom prst="rect">
+                <a:avLst/>
+              </a:prstGeom>
+              <a:noFill/>
+              <a:ln>
+                <a:noFill/>
+              </a:ln>
+            </p:spPr>
+            <p:txBody>
+              <a:bodyPr wrap="none" lIns="0" tIns="0" rIns="0" bIns="0" anchor="t" anchorCtr="0">
+                <a:spAutoFit/>
+              </a:bodyPr>
+              <a:lstStyle/>
+              <a:p>
+                <a:pPr algn="l"/>
+                <a:r>
+                  <a:rPr lang="zh-CN" sz="1500" b="1" dirty="0">
+                    <a:solidFill>
+                      <a:srgbClr val="0B3D66"/>
+                    </a:solidFill>
+                    <a:latin typeface="Arial"/>
+                    <a:ea typeface="Microsoft YaHei"/>
+                    <a:cs typeface="Arial"/>
+                  </a:rPr>
+                  <a:t>工具调用</a:t>
+                </a:r>
+              </a:p>
+            </p:txBody>
+          </p:sp>
+          <p:sp>
+            <p:nvSpPr>
+              <p:cNvPr id="25" name="TextBox 25"/>
+              <p:cNvSpPr txBox="1"/>
+              <p:nvPr/>
+            </p:nvSpPr>
+            <p:spPr>
+              <a:xfrm>
+                <a:off x="6623685" y="2470150"/>
+                <a:ext cx="1146841" cy="220028"/>
+              </a:xfrm>
+              <a:prstGeom prst="rect">
+                <a:avLst/>
+              </a:prstGeom>
+              <a:noFill/>
+              <a:ln>
+                <a:noFill/>
+              </a:ln>
+            </p:spPr>
+            <p:txBody>
+              <a:bodyPr wrap="none" lIns="0" tIns="0" rIns="0" bIns="0" anchor="t" anchorCtr="0">
+                <a:spAutoFit/>
+              </a:bodyPr>
+              <a:lstStyle/>
+              <a:p>
+                <a:pPr algn="l"/>
+                <a:r>
+                  <a:rPr lang="zh-CN" sz="1120" dirty="0">
+                    <a:solidFill>
+                      <a:srgbClr val="5A6472"/>
+                    </a:solidFill>
+                    <a:latin typeface="Arial"/>
+                    <a:ea typeface="Microsoft YaHei"/>
+                    <a:cs typeface="Arial"/>
+                  </a:rPr>
+                  <a:t>计算 · 表格 · API</a:t>
+                </a:r>
+              </a:p>
+            </p:txBody>
+          </p:sp>
+        </p:grpSp>
+        <p:grpSp>
+          <p:nvGrpSpPr>
+            <p:cNvPr id="33" name="loop-reflect"/>
+            <p:cNvGrpSpPr/>
+            <p:nvPr/>
+          </p:nvGrpSpPr>
+          <p:grpSpPr>
+            <a:xfrm>
+              <a:off x="9296400" y="1714500"/>
+              <a:ext cx="2286000" cy="1333500"/>
+              <a:chOff x="9296400" y="1714500"/>
+              <a:chExt cx="2286000" cy="1333500"/>
+            </a:xfrm>
+          </p:grpSpPr>
+          <p:sp>
+            <p:nvSpPr>
+              <p:cNvPr id="27" name="Rectangle 27"/>
+              <p:cNvSpPr/>
+              <p:nvPr/>
+            </p:nvSpPr>
+            <p:spPr>
+              <a:xfrm>
+                <a:off x="9296400" y="1714500"/>
+                <a:ext cx="2286000" cy="1333500"/>
+              </a:xfrm>
+              <a:prstGeom prst="roundRect">
+                <a:avLst>
+                  <a:gd name="adj" fmla="val 2857"/>
+                </a:avLst>
+              </a:prstGeom>
+              <a:solidFill>
+                <a:srgbClr val="F4F6F8"/>
+              </a:solidFill>
+              <a:ln>
+                <a:noFill/>
+              </a:ln>
+            </p:spPr>
+          </p:sp>
+          <p:sp>
+            <p:nvSpPr>
+              <p:cNvPr id="28" name="Freeform 28"/>
+              <p:cNvSpPr/>
+              <p:nvPr/>
+            </p:nvSpPr>
+            <p:spPr>
+              <a:xfrm>
+                <a:off x="9296400" y="1714500"/>
+                <a:ext cx="38100" cy="1333500"/>
+              </a:xfrm>
+              <a:custGeom>
+                <a:avLst/>
+                <a:gdLst/>
+                <a:ahLst/>
+                <a:cxnLst/>
+                <a:rect l="l" t="t" r="r" b="b"/>
+                <a:pathLst>
+                  <a:path w="38100" h="1333500">
+                    <a:moveTo>
+                      <a:pt x="0" y="0"/>
+                    </a:moveTo>
+                    <a:lnTo>
+                      <a:pt x="38100" y="0"/>
+                    </a:lnTo>
+                    <a:lnTo>
+                      <a:pt x="38100" y="1333500"/>
+                    </a:lnTo>
+                    <a:lnTo>
+                      <a:pt x="0" y="1333500"/>
+                    </a:lnTo>
+                    <a:close/>
+                  </a:path>
+                </a:pathLst>
+              </a:custGeom>
+              <a:solidFill>
+                <a:srgbClr val="0E7C66"/>
+              </a:solidFill>
+              <a:ln>
+                <a:noFill/>
+              </a:ln>
+            </p:spPr>
+          </p:sp>
+          <p:sp>
+            <p:nvSpPr>
+              <p:cNvPr id="29" name="Ellipse 29"/>
+              <p:cNvSpPr/>
+              <p:nvPr/>
+            </p:nvSpPr>
+            <p:spPr>
+              <a:xfrm>
+                <a:off x="11249025" y="1838325"/>
+                <a:ext cx="209550" cy="209550"/>
+              </a:xfrm>
+              <a:prstGeom prst="ellipse">
+                <a:avLst/>
+              </a:prstGeom>
+              <a:solidFill>
+                <a:srgbClr val="0E7C66"/>
+              </a:solidFill>
+              <a:ln>
+                <a:noFill/>
+              </a:ln>
+            </p:spPr>
+          </p:sp>
+          <p:sp>
+            <p:nvSpPr>
+              <p:cNvPr id="30" name="TextBox 30"/>
+              <p:cNvSpPr txBox="1"/>
+              <p:nvPr/>
+            </p:nvSpPr>
+            <p:spPr>
+              <a:xfrm>
+                <a:off x="11306155" y="1851025"/>
+                <a:ext cx="95291" cy="220028"/>
+              </a:xfrm>
+              <a:prstGeom prst="rect">
+                <a:avLst/>
+              </a:prstGeom>
+              <a:noFill/>
+              <a:ln>
+                <a:noFill/>
+              </a:ln>
+            </p:spPr>
+            <p:txBody>
+              <a:bodyPr wrap="none" lIns="0" tIns="0" rIns="0" bIns="0" anchor="t" anchorCtr="0">
+                <a:spAutoFit/>
+              </a:bodyPr>
+              <a:lstStyle/>
+              <a:p>
+                <a:pPr algn="ctr"/>
+                <a:r>
+                  <a:rPr lang="en-US" sz="1120" dirty="0">
+                    <a:solidFill>
+                      <a:srgbClr val="FFFFFF"/>
+                    </a:solidFill>
+                    <a:latin typeface="Arial"/>
+                    <a:ea typeface="Arial"/>
+                    <a:cs typeface="Arial"/>
+                  </a:rPr>
+                  <a:t>4</a:t>
+                </a:r>
+              </a:p>
+            </p:txBody>
+          </p:sp>
+          <p:sp>
+            <p:nvSpPr>
+              <p:cNvPr id="31" name="TextBox 31"/>
+              <p:cNvSpPr txBox="1"/>
+              <p:nvPr/>
+            </p:nvSpPr>
+            <p:spPr>
+              <a:xfrm>
+                <a:off x="9517380" y="2032000"/>
+                <a:ext cx="419100" cy="293370"/>
+              </a:xfrm>
+              <a:prstGeom prst="rect">
+                <a:avLst/>
+              </a:prstGeom>
+              <a:noFill/>
+              <a:ln>
+                <a:noFill/>
+              </a:ln>
+            </p:spPr>
+            <p:txBody>
+              <a:bodyPr wrap="none" lIns="0" tIns="0" rIns="0" bIns="0" anchor="t" anchorCtr="0">
+                <a:spAutoFit/>
+              </a:bodyPr>
+              <a:lstStyle/>
+              <a:p>
+                <a:pPr algn="l"/>
+                <a:r>
+                  <a:rPr lang="zh-CN" sz="1500" b="1" dirty="0">
+                    <a:solidFill>
+                      <a:srgbClr val="0B3D66"/>
+                    </a:solidFill>
+                    <a:latin typeface="Arial"/>
+                    <a:ea typeface="Microsoft YaHei"/>
+                    <a:cs typeface="Arial"/>
+                  </a:rPr>
+                  <a:t>反思</a:t>
+                </a:r>
+              </a:p>
+            </p:txBody>
+          </p:sp>
+          <p:sp>
+            <p:nvSpPr>
+              <p:cNvPr id="32" name="TextBox 32"/>
+              <p:cNvSpPr txBox="1"/>
+              <p:nvPr/>
+            </p:nvSpPr>
+            <p:spPr>
+              <a:xfrm>
+                <a:off x="9519285" y="2470150"/>
+                <a:ext cx="1368400" cy="220028"/>
+              </a:xfrm>
+              <a:prstGeom prst="rect">
+                <a:avLst/>
+              </a:prstGeom>
+              <a:noFill/>
+              <a:ln>
+                <a:noFill/>
+              </a:ln>
+            </p:spPr>
+            <p:txBody>
+              <a:bodyPr wrap="none" lIns="0" tIns="0" rIns="0" bIns="0" anchor="t" anchorCtr="0">
+                <a:spAutoFit/>
+              </a:bodyPr>
+              <a:lstStyle/>
+              <a:p>
+                <a:pPr algn="l"/>
+                <a:r>
+                  <a:rPr lang="zh-CN" sz="1120" dirty="0">
+                    <a:solidFill>
+                      <a:srgbClr val="5A6472"/>
+                    </a:solidFill>
+                    <a:latin typeface="Arial"/>
+                    <a:ea typeface="Microsoft YaHei"/>
+                    <a:cs typeface="Arial"/>
+                  </a:rPr>
+                  <a:t>校验答案，按需修正</a:t>
+                </a:r>
+              </a:p>
+            </p:txBody>
+          </p:sp>
+        </p:grpSp>
+        <p:sp>
+          <p:nvSpPr>
+            <p:cNvPr id="34" name="Line 34"/>
+            <p:cNvSpPr/>
+            <p:nvPr/>
+          </p:nvSpPr>
+          <p:spPr>
+            <a:xfrm>
+              <a:off x="2895600" y="2381250"/>
+              <a:ext cx="552450" cy="9525"/>
+            </a:xfrm>
+            <a:custGeom>
+              <a:avLst/>
+              <a:gdLst/>
+              <a:ahLst/>
+              <a:cxnLst/>
+              <a:rect l="l" t="t" r="r" b="b"/>
+              <a:pathLst>
+                <a:path w="552450" h="9525">
+                  <a:moveTo>
+                    <a:pt x="0" y="0"/>
+                  </a:moveTo>
+                  <a:lnTo>
+                    <a:pt x="552450" y="0"/>
+                  </a:lnTo>
+                </a:path>
+              </a:pathLst>
+            </a:custGeom>
+            <a:noFill/>
+            <a:ln w="19050">
+              <a:solidFill>
+                <a:srgbClr val="0E7C66"/>
+              </a:solidFill>
+            </a:ln>
+          </p:spPr>
+        </p:sp>
+        <p:sp>
+          <p:nvSpPr>
+            <p:cNvPr id="35" name="Freeform 35"/>
+            <p:cNvSpPr/>
+            <p:nvPr/>
+          </p:nvSpPr>
+          <p:spPr>
+            <a:xfrm>
+              <a:off x="3390900" y="2314575"/>
+              <a:ext cx="114300" cy="133350"/>
+            </a:xfrm>
+            <a:custGeom>
+              <a:avLst/>
+              <a:gdLst/>
+              <a:ahLst/>
+              <a:cxnLst/>
+              <a:rect l="l" t="t" r="r" b="b"/>
+              <a:pathLst>
+                <a:path w="114300" h="133350">
+                  <a:moveTo>
+                    <a:pt x="114300" y="66675"/>
+                  </a:moveTo>
+                  <a:lnTo>
+                    <a:pt x="0" y="0"/>
+                  </a:lnTo>
+                  <a:lnTo>
+                    <a:pt x="0" y="133350"/>
+                  </a:lnTo>
+                  <a:close/>
+                </a:path>
+              </a:pathLst>
+            </a:custGeom>
+            <a:solidFill>
+              <a:srgbClr val="0E7C66"/>
+            </a:solidFill>
+            <a:ln>
+              <a:noFill/>
+            </a:ln>
+          </p:spPr>
+        </p:sp>
+        <p:sp>
+          <p:nvSpPr>
+            <p:cNvPr id="36" name="Line 36"/>
+            <p:cNvSpPr/>
+            <p:nvPr/>
+          </p:nvSpPr>
+          <p:spPr>
+            <a:xfrm>
+              <a:off x="5791200" y="2381250"/>
+              <a:ext cx="552450" cy="9525"/>
+            </a:xfrm>
+            <a:custGeom>
+              <a:avLst/>
+              <a:gdLst/>
+              <a:ahLst/>
+              <a:cxnLst/>
+              <a:rect l="l" t="t" r="r" b="b"/>
+              <a:pathLst>
+                <a:path w="552450" h="9525">
+                  <a:moveTo>
+                    <a:pt x="0" y="0"/>
+                  </a:moveTo>
+                  <a:lnTo>
+                    <a:pt x="552450" y="0"/>
+                  </a:lnTo>
+                </a:path>
+              </a:pathLst>
+            </a:custGeom>
+            <a:noFill/>
+            <a:ln w="19050">
+              <a:solidFill>
+                <a:srgbClr val="0E7C66"/>
+              </a:solidFill>
+            </a:ln>
+          </p:spPr>
+        </p:sp>
+        <p:sp>
+          <p:nvSpPr>
+            <p:cNvPr id="37" name="Freeform 37"/>
+            <p:cNvSpPr/>
+            <p:nvPr/>
+          </p:nvSpPr>
+          <p:spPr>
+            <a:xfrm>
+              <a:off x="6286500" y="2314575"/>
+              <a:ext cx="114300" cy="133350"/>
+            </a:xfrm>
+            <a:custGeom>
+              <a:avLst/>
+              <a:gdLst/>
+              <a:ahLst/>
+              <a:cxnLst/>
+              <a:rect l="l" t="t" r="r" b="b"/>
+              <a:pathLst>
+                <a:path w="114300" h="133350">
+                  <a:moveTo>
+                    <a:pt x="114300" y="66675"/>
+                  </a:moveTo>
+                  <a:lnTo>
+                    <a:pt x="0" y="0"/>
+                  </a:lnTo>
+                  <a:lnTo>
+                    <a:pt x="0" y="133350"/>
+                  </a:lnTo>
+                  <a:close/>
+                </a:path>
+              </a:pathLst>
+            </a:custGeom>
+            <a:solidFill>
+              <a:srgbClr val="0E7C66"/>
+            </a:solidFill>
+            <a:ln>
+              <a:noFill/>
+            </a:ln>
+          </p:spPr>
+        </p:sp>
+        <p:sp>
+          <p:nvSpPr>
+            <p:cNvPr id="38" name="Line 38"/>
+            <p:cNvSpPr/>
+            <p:nvPr/>
+          </p:nvSpPr>
+          <p:spPr>
+            <a:xfrm>
+              <a:off x="8686800" y="2381250"/>
+              <a:ext cx="552450" cy="9525"/>
+            </a:xfrm>
+            <a:custGeom>
+              <a:avLst/>
+              <a:gdLst/>
+              <a:ahLst/>
+              <a:cxnLst/>
+              <a:rect l="l" t="t" r="r" b="b"/>
+              <a:pathLst>
+                <a:path w="552450" h="9525">
+                  <a:moveTo>
+                    <a:pt x="0" y="0"/>
+                  </a:moveTo>
+                  <a:lnTo>
+                    <a:pt x="552450" y="0"/>
+                  </a:lnTo>
+                </a:path>
+              </a:pathLst>
+            </a:custGeom>
+            <a:noFill/>
+            <a:ln w="19050">
+              <a:solidFill>
+                <a:srgbClr val="0E7C66"/>
+              </a:solidFill>
+            </a:ln>
+          </p:spPr>
+        </p:sp>
+        <p:sp>
+          <p:nvSpPr>
+            <p:cNvPr id="39" name="Freeform 39"/>
+            <p:cNvSpPr/>
+            <p:nvPr/>
+          </p:nvSpPr>
+          <p:spPr>
+            <a:xfrm>
+              <a:off x="9182100" y="2314575"/>
+              <a:ext cx="114300" cy="133350"/>
+            </a:xfrm>
+            <a:custGeom>
+              <a:avLst/>
+              <a:gdLst/>
+              <a:ahLst/>
+              <a:cxnLst/>
+              <a:rect l="l" t="t" r="r" b="b"/>
+              <a:pathLst>
+                <a:path w="114300" h="133350">
+                  <a:moveTo>
+                    <a:pt x="114300" y="66675"/>
+                  </a:moveTo>
+                  <a:lnTo>
+                    <a:pt x="0" y="0"/>
+                  </a:lnTo>
+                  <a:lnTo>
+                    <a:pt x="0" y="133350"/>
+                  </a:lnTo>
+                  <a:close/>
+                </a:path>
+              </a:pathLst>
+            </a:custGeom>
+            <a:solidFill>
+              <a:srgbClr val="0E7C66"/>
+            </a:solidFill>
+            <a:ln>
+              <a:noFill/>
+            </a:ln>
+          </p:spPr>
+        </p:sp>
+        <p:sp>
+          <p:nvSpPr>
+            <p:cNvPr id="40" name="Freeform 40"/>
+            <p:cNvSpPr/>
+            <p:nvPr/>
+          </p:nvSpPr>
+          <p:spPr>
+            <a:xfrm>
+              <a:off x="1752600" y="3048000"/>
+              <a:ext cx="8686800" cy="285750"/>
+            </a:xfrm>
+            <a:custGeom>
+              <a:avLst/>
+              <a:gdLst/>
+              <a:ahLst/>
+              <a:cxnLst/>
+              <a:rect l="l" t="t" r="r" b="b"/>
+              <a:pathLst>
+                <a:path w="8686800" h="285750">
+                  <a:moveTo>
+                    <a:pt x="8686800" y="0"/>
+                  </a:moveTo>
+                  <a:lnTo>
+                    <a:pt x="8686800" y="285750"/>
+                  </a:lnTo>
+                  <a:lnTo>
+                    <a:pt x="0" y="285750"/>
+                  </a:lnTo>
+                  <a:lnTo>
+                    <a:pt x="0" y="57150"/>
+                  </a:lnTo>
+                </a:path>
+              </a:pathLst>
+            </a:custGeom>
+            <a:noFill/>
+            <a:ln w="19050">
+              <a:solidFill>
+                <a:srgbClr val="0E7C66"/>
+              </a:solidFill>
+            </a:ln>
+          </p:spPr>
+        </p:sp>
+        <p:sp>
+          <p:nvSpPr>
+            <p:cNvPr id="41" name="Freeform 41"/>
+            <p:cNvSpPr/>
+            <p:nvPr/>
+          </p:nvSpPr>
+          <p:spPr>
+            <a:xfrm>
+              <a:off x="1685925" y="3009900"/>
+              <a:ext cx="133350" cy="133350"/>
+            </a:xfrm>
+            <a:custGeom>
+              <a:avLst/>
+              <a:gdLst/>
+              <a:ahLst/>
+              <a:cxnLst/>
+              <a:rect l="l" t="t" r="r" b="b"/>
+              <a:pathLst>
+                <a:path w="133350" h="133350">
+                  <a:moveTo>
+                    <a:pt x="66675" y="0"/>
+                  </a:moveTo>
+                  <a:lnTo>
+                    <a:pt x="0" y="133350"/>
+                  </a:lnTo>
+                  <a:lnTo>
+                    <a:pt x="133350" y="133350"/>
+                  </a:lnTo>
+                  <a:close/>
+                </a:path>
+              </a:pathLst>
+            </a:custGeom>
+            <a:solidFill>
+              <a:srgbClr val="0E7C66"/>
+            </a:solidFill>
+            <a:ln>
+              <a:noFill/>
+            </a:ln>
+          </p:spPr>
+        </p:sp>
+        <p:sp>
+          <p:nvSpPr>
+            <p:cNvPr id="42" name="TextBox 42"/>
+            <p:cNvSpPr txBox="1"/>
+            <p:nvPr/>
+          </p:nvSpPr>
+          <p:spPr>
+            <a:xfrm>
+              <a:off x="5462460" y="3416300"/>
+              <a:ext cx="1267080" cy="205359"/>
+            </a:xfrm>
+            <a:prstGeom prst="rect">
+              <a:avLst/>
+            </a:prstGeom>
+            <a:noFill/>
+            <a:ln>
+              <a:noFill/>
+            </a:ln>
+          </p:spPr>
+          <p:txBody>
+            <a:bodyPr wrap="none" lIns="0" tIns="0" rIns="0" bIns="0" anchor="t" anchorCtr="0">
+              <a:spAutoFit/>
+            </a:bodyPr>
+            <a:lstStyle/>
+            <a:p>
+              <a:pPr algn="ctr"/>
+              <a:r>
+                <a:rPr lang="zh-CN" sz="1050" dirty="0">
+                  <a:solidFill>
+                    <a:srgbClr val="5A6472"/>
+                  </a:solidFill>
+                  <a:latin typeface="Arial"/>
+                  <a:ea typeface="Microsoft YaHei"/>
+                  <a:cs typeface="Arial"/>
+                </a:rPr>
+                <a:t>多轮迭代 · 形成闭环</a:t>
+              </a:r>
+            </a:p>
+          </p:txBody>
+        </p:sp>
+      </p:grpSp>
+      <p:grpSp>
+        <p:nvGrpSpPr>
+          <p:cNvPr id="51" name="card-vs"/>
+          <p:cNvGrpSpPr/>
+          <p:nvPr/>
+        </p:nvGrpSpPr>
+        <p:grpSpPr>
+          <a:xfrm>
+            <a:off x="609600" y="3810000"/>
+            <a:ext cx="5334000" cy="2247900"/>
+            <a:chOff x="609600" y="3810000"/>
+            <a:chExt cx="5334000" cy="2247900"/>
+          </a:xfrm>
+        </p:grpSpPr>
+        <p:sp>
+          <p:nvSpPr>
+            <p:cNvPr id="44" name="Rectangle 44"/>
+            <p:cNvSpPr/>
+            <p:nvPr/>
+          </p:nvSpPr>
+          <p:spPr>
+            <a:xfrm>
+              <a:off x="609600" y="3810000"/>
+              <a:ext cx="5334000" cy="2247900"/>
+            </a:xfrm>
+            <a:prstGeom prst="roundRect">
+              <a:avLst>
+                <a:gd name="adj" fmla="val 1695"/>
+              </a:avLst>
+            </a:prstGeom>
+            <a:solidFill>
+              <a:srgbClr val="F4F6F8"/>
+            </a:solidFill>
+            <a:ln>
+              <a:noFill/>
+            </a:ln>
+          </p:spPr>
+        </p:sp>
+        <p:sp>
+          <p:nvSpPr>
+            <p:cNvPr id="45" name="Freeform 45"/>
+            <p:cNvSpPr/>
+            <p:nvPr/>
+          </p:nvSpPr>
+          <p:spPr>
+            <a:xfrm>
+              <a:off x="609600" y="3810000"/>
+              <a:ext cx="38100" cy="2247900"/>
+            </a:xfrm>
+            <a:custGeom>
+              <a:avLst/>
+              <a:gdLst/>
+              <a:ahLst/>
+              <a:cxnLst/>
+              <a:rect l="l" t="t" r="r" b="b"/>
+              <a:pathLst>
+                <a:path w="38100" h="2247900">
+                  <a:moveTo>
+                    <a:pt x="0" y="0"/>
+                  </a:moveTo>
+                  <a:lnTo>
+                    <a:pt x="38100" y="0"/>
+                  </a:lnTo>
+                  <a:lnTo>
+                    <a:pt x="38100" y="2247900"/>
+                  </a:lnTo>
+                  <a:lnTo>
+                    <a:pt x="0" y="2247900"/>
+                  </a:lnTo>
+                  <a:close/>
+                </a:path>
+              </a:pathLst>
+            </a:custGeom>
+            <a:solidFill>
+              <a:srgbClr val="0B3D66"/>
+            </a:solidFill>
+            <a:ln>
+              <a:noFill/>
+            </a:ln>
+          </p:spPr>
+        </p:sp>
+        <p:sp>
+          <p:nvSpPr>
+            <p:cNvPr id="46" name="TextBox 46"/>
+            <p:cNvSpPr txBox="1"/>
+            <p:nvPr/>
+          </p:nvSpPr>
+          <p:spPr>
+            <a:xfrm>
+              <a:off x="831342" y="3959225"/>
+              <a:ext cx="1637542" cy="264033"/>
+            </a:xfrm>
+            <a:prstGeom prst="rect">
+              <a:avLst/>
+            </a:prstGeom>
+            <a:noFill/>
+            <a:ln>
+              <a:noFill/>
+            </a:ln>
+          </p:spPr>
+          <p:txBody>
+            <a:bodyPr wrap="none" lIns="0" tIns="0" rIns="0" bIns="0" anchor="t" anchorCtr="0">
+              <a:spAutoFit/>
+            </a:bodyPr>
+            <a:lstStyle/>
+            <a:p>
+              <a:pPr algn="l"/>
+              <a:r>
+                <a:rPr lang="zh-CN" sz="1350" b="1" dirty="0">
+                  <a:solidFill>
+                    <a:srgbClr val="0B3D66"/>
+                  </a:solidFill>
+                  <a:latin typeface="Arial"/>
+                  <a:ea typeface="Microsoft YaHei"/>
+                  <a:cs typeface="Arial"/>
+                </a:rPr>
+                <a:t>与传统 RAG 的差别</a:t>
+              </a:r>
+            </a:p>
+          </p:txBody>
+        </p:sp>
+        <p:sp>
+          <p:nvSpPr>
+            <p:cNvPr id="47" name="Ellipse 47"/>
+            <p:cNvSpPr/>
+            <p:nvPr/>
+          </p:nvSpPr>
+          <p:spPr>
+            <a:xfrm>
+              <a:off x="847725" y="4410075"/>
+              <a:ext cx="57150" cy="57150"/>
+            </a:xfrm>
+            <a:prstGeom prst="ellipse">
+              <a:avLst/>
+            </a:prstGeom>
+            <a:solidFill>
+              <a:srgbClr val="0B3D66"/>
+            </a:solidFill>
+            <a:ln>
+              <a:noFill/>
+            </a:ln>
+          </p:spPr>
+        </p:sp>
+        <p:sp>
+          <p:nvSpPr>
+            <p:cNvPr id="48" name="TextBox 48"/>
+            <p:cNvSpPr txBox="1"/>
+            <p:nvPr/>
+          </p:nvSpPr>
+          <p:spPr>
+            <a:xfrm>
+              <a:off x="973455" y="4337050"/>
+              <a:ext cx="4166032" cy="293370"/>
+            </a:xfrm>
+            <a:prstGeom prst="rect">
+              <a:avLst/>
+            </a:prstGeom>
+            <a:noFill/>
+            <a:ln>
+              <a:noFill/>
+            </a:ln>
+          </p:spPr>
+          <p:txBody>
+            <a:bodyPr wrap="none" lIns="0" tIns="0" rIns="0" bIns="0" anchor="t" anchorCtr="0">
+              <a:spAutoFit/>
+            </a:bodyPr>
+            <a:lstStyle/>
+            <a:p>
+              <a:pPr algn="l"/>
+              <a:r>
+                <a:rPr lang="zh-CN" sz="1500" dirty="0">
+                  <a:solidFill>
+                    <a:srgbClr val="1B1F24"/>
+                  </a:solidFill>
+                  <a:latin typeface="Arial"/>
+                  <a:ea typeface="Microsoft YaHei"/>
+                  <a:cs typeface="Arial"/>
+                </a:rPr>
+                <a:t>传统：单轮「检索 → 生成」，一次取回即作答</a:t>
+              </a:r>
+            </a:p>
+          </p:txBody>
+        </p:sp>
+        <p:sp>
+          <p:nvSpPr>
+            <p:cNvPr id="49" name="Ellipse 49"/>
+            <p:cNvSpPr/>
+            <p:nvPr/>
+          </p:nvSpPr>
+          <p:spPr>
+            <a:xfrm>
+              <a:off x="847725" y="4772025"/>
+              <a:ext cx="57150" cy="57150"/>
+            </a:xfrm>
+            <a:prstGeom prst="ellipse">
+              <a:avLst/>
+            </a:prstGeom>
+            <a:solidFill>
+              <a:srgbClr val="0B3D66"/>
+            </a:solidFill>
+            <a:ln>
+              <a:noFill/>
+            </a:ln>
+          </p:spPr>
+        </p:sp>
+        <p:sp>
+          <p:nvSpPr>
+            <p:cNvPr id="50" name="TextBox 50"/>
+            <p:cNvSpPr txBox="1"/>
+            <p:nvPr/>
+          </p:nvSpPr>
+          <p:spPr>
+            <a:xfrm>
+              <a:off x="973455" y="4699000"/>
+              <a:ext cx="4665561" cy="293370"/>
+            </a:xfrm>
+            <a:prstGeom prst="rect">
+              <a:avLst/>
+            </a:prstGeom>
+            <a:noFill/>
+            <a:ln>
+              <a:noFill/>
+            </a:ln>
+          </p:spPr>
+          <p:txBody>
+            <a:bodyPr wrap="none" lIns="0" tIns="0" rIns="0" bIns="0" anchor="t" anchorCtr="0">
+              <a:spAutoFit/>
+            </a:bodyPr>
+            <a:lstStyle/>
+            <a:p>
+              <a:pPr algn="l"/>
+              <a:r>
+                <a:rPr lang="zh-CN" sz="1500" dirty="0">
+                  <a:solidFill>
+                    <a:srgbClr val="1B1F24"/>
+                  </a:solidFill>
+                  <a:latin typeface="Arial"/>
+                  <a:ea typeface="Microsoft YaHei"/>
+                  <a:cs typeface="Arial"/>
+                </a:rPr>
+                <a:t>Agentic：多轮「规划 → 检索 → 工具 → 反思」闭环</a:t>
+              </a:r>
+            </a:p>
+          </p:txBody>
+        </p:sp>
+      </p:grpSp>
+      <p:grpSp>
+        <p:nvGrpSpPr>
+          <p:cNvPr id="59" name="card-link"/>
+          <p:cNvGrpSpPr/>
+          <p:nvPr/>
+        </p:nvGrpSpPr>
+        <p:grpSpPr>
+          <a:xfrm>
+            <a:off x="6248400" y="3810000"/>
+            <a:ext cx="5334000" cy="2247900"/>
+            <a:chOff x="6248400" y="3810000"/>
+            <a:chExt cx="5334000" cy="2247900"/>
+          </a:xfrm>
+        </p:grpSpPr>
+        <p:sp>
+          <p:nvSpPr>
+            <p:cNvPr id="52" name="Rectangle 52"/>
+            <p:cNvSpPr/>
+            <p:nvPr/>
+          </p:nvSpPr>
+          <p:spPr>
+            <a:xfrm>
+              <a:off x="6248400" y="3810000"/>
+              <a:ext cx="5334000" cy="2247900"/>
+            </a:xfrm>
+            <a:prstGeom prst="roundRect">
+              <a:avLst>
+                <a:gd name="adj" fmla="val 1695"/>
+              </a:avLst>
+            </a:prstGeom>
+            <a:solidFill>
+              <a:srgbClr val="F4F6F8"/>
+            </a:solidFill>
+            <a:ln>
+              <a:noFill/>
+            </a:ln>
+          </p:spPr>
+        </p:sp>
+        <p:sp>
+          <p:nvSpPr>
+            <p:cNvPr id="53" name="Freeform 53"/>
+            <p:cNvSpPr/>
+            <p:nvPr/>
+          </p:nvSpPr>
+          <p:spPr>
+            <a:xfrm>
+              <a:off x="6248400" y="3810000"/>
+              <a:ext cx="38100" cy="2247900"/>
+            </a:xfrm>
+            <a:custGeom>
+              <a:avLst/>
+              <a:gdLst/>
+              <a:ahLst/>
+              <a:cxnLst/>
+              <a:rect l="l" t="t" r="r" b="b"/>
+              <a:pathLst>
+                <a:path w="38100" h="2247900">
+                  <a:moveTo>
+                    <a:pt x="0" y="0"/>
+                  </a:moveTo>
+                  <a:lnTo>
+                    <a:pt x="38100" y="0"/>
+                  </a:lnTo>
+                  <a:lnTo>
+                    <a:pt x="38100" y="2247900"/>
+                  </a:lnTo>
+                  <a:lnTo>
+                    <a:pt x="0" y="2247900"/>
+                  </a:lnTo>
+                  <a:close/>
+                </a:path>
+              </a:pathLst>
+            </a:custGeom>
+            <a:solidFill>
+              <a:srgbClr val="0E7C66"/>
+            </a:solidFill>
+            <a:ln>
+              <a:noFill/>
+            </a:ln>
+          </p:spPr>
+        </p:sp>
+        <p:sp>
+          <p:nvSpPr>
+            <p:cNvPr id="54" name="TextBox 54"/>
+            <p:cNvSpPr txBox="1"/>
+            <p:nvPr/>
+          </p:nvSpPr>
+          <p:spPr>
+            <a:xfrm>
+              <a:off x="6470142" y="3959225"/>
+              <a:ext cx="1285875" cy="264033"/>
+            </a:xfrm>
+            <a:prstGeom prst="rect">
+              <a:avLst/>
+            </a:prstGeom>
+            <a:noFill/>
+            <a:ln>
+              <a:noFill/>
+            </a:ln>
+          </p:spPr>
+          <p:txBody>
+            <a:bodyPr wrap="none" lIns="0" tIns="0" rIns="0" bIns="0" anchor="t" anchorCtr="0">
+              <a:spAutoFit/>
+            </a:bodyPr>
+            <a:lstStyle/>
+            <a:p>
+              <a:pPr algn="l"/>
+              <a:r>
+                <a:rPr lang="zh-CN" sz="1350" b="1" dirty="0">
+                  <a:solidFill>
+                    <a:srgbClr val="0E7C66"/>
+                  </a:solidFill>
+                  <a:latin typeface="Arial"/>
+                  <a:ea typeface="Microsoft YaHei"/>
+                  <a:cs typeface="Arial"/>
+                </a:rPr>
+                <a:t>与本项目的衔接</a:t>
+              </a:r>
+            </a:p>
+          </p:txBody>
+        </p:sp>
+        <p:sp>
+          <p:nvSpPr>
+            <p:cNvPr id="55" name="Ellipse 55"/>
+            <p:cNvSpPr/>
+            <p:nvPr/>
+          </p:nvSpPr>
+          <p:spPr>
+            <a:xfrm>
+              <a:off x="6486525" y="4410075"/>
+              <a:ext cx="57150" cy="57150"/>
+            </a:xfrm>
+            <a:prstGeom prst="ellipse">
+              <a:avLst/>
+            </a:prstGeom>
+            <a:solidFill>
+              <a:srgbClr val="0E7C66"/>
+            </a:solidFill>
+            <a:ln>
+              <a:noFill/>
+            </a:ln>
+          </p:spPr>
+        </p:sp>
+        <p:sp>
+          <p:nvSpPr>
+            <p:cNvPr id="56" name="TextBox 56"/>
+            <p:cNvSpPr txBox="1"/>
+            <p:nvPr/>
+          </p:nvSpPr>
+          <p:spPr>
+            <a:xfrm>
+              <a:off x="6612255" y="4337050"/>
+              <a:ext cx="4457700" cy="293370"/>
+            </a:xfrm>
+            <a:prstGeom prst="rect">
+              <a:avLst/>
+            </a:prstGeom>
+            <a:noFill/>
+            <a:ln>
+              <a:noFill/>
+            </a:ln>
+          </p:spPr>
+          <p:txBody>
+            <a:bodyPr wrap="none" lIns="0" tIns="0" rIns="0" bIns="0" anchor="t" anchorCtr="0">
+              <a:spAutoFit/>
+            </a:bodyPr>
+            <a:lstStyle/>
+            <a:p>
+              <a:pPr algn="l"/>
+              <a:r>
+                <a:rPr lang="zh-CN" sz="1500" dirty="0">
+                  <a:solidFill>
+                    <a:srgbClr val="1B1F24"/>
+                  </a:solidFill>
+                  <a:latin typeface="Arial"/>
+                  <a:ea typeface="Microsoft YaHei"/>
+                  <a:cs typeface="Arial"/>
+                </a:rPr>
+                <a:t>承接「下一步」：表格结构化抽取、标注对齐重评</a:t>
+              </a:r>
+            </a:p>
+          </p:txBody>
+        </p:sp>
+        <p:sp>
+          <p:nvSpPr>
+            <p:cNvPr id="57" name="Ellipse 57"/>
+            <p:cNvSpPr/>
+            <p:nvPr/>
+          </p:nvSpPr>
+          <p:spPr>
+            <a:xfrm>
+              <a:off x="6486525" y="4772025"/>
+              <a:ext cx="57150" cy="57150"/>
+            </a:xfrm>
+            <a:prstGeom prst="ellipse">
+              <a:avLst/>
+            </a:prstGeom>
+            <a:solidFill>
+              <a:srgbClr val="0E7C66"/>
+            </a:solidFill>
+            <a:ln>
+              <a:noFill/>
+            </a:ln>
+          </p:spPr>
+        </p:sp>
+        <p:sp>
+          <p:nvSpPr>
+            <p:cNvPr id="58" name="TextBox 58"/>
+            <p:cNvSpPr txBox="1"/>
+            <p:nvPr/>
+          </p:nvSpPr>
+          <p:spPr>
+            <a:xfrm>
+              <a:off x="6612255" y="4699000"/>
+              <a:ext cx="3851910" cy="293370"/>
+            </a:xfrm>
+            <a:prstGeom prst="rect">
+              <a:avLst/>
+            </a:prstGeom>
+            <a:noFill/>
+            <a:ln>
+              <a:noFill/>
+            </a:ln>
+          </p:spPr>
+          <p:txBody>
+            <a:bodyPr wrap="none" lIns="0" tIns="0" rIns="0" bIns="0" anchor="t" anchorCtr="0">
+              <a:spAutoFit/>
+            </a:bodyPr>
+            <a:lstStyle/>
+            <a:p>
+              <a:pPr algn="l"/>
+              <a:r>
+                <a:rPr lang="zh-CN" sz="1500" dirty="0">
+                  <a:solidFill>
+                    <a:srgbClr val="1B1F24"/>
+                  </a:solidFill>
+                  <a:latin typeface="Arial"/>
+                  <a:ea typeface="Microsoft YaHei"/>
+                  <a:cs typeface="Arial"/>
+                </a:rPr>
+                <a:t>上下文预算与安全加固是智能体落地的基础</a:t>
+              </a:r>
+            </a:p>
+          </p:txBody>
+        </p:sp>
+      </p:grpSp>
+      <p:grpSp>
+        <p:nvGrpSpPr>
+          <p:cNvPr id="62" name="footer"/>
+          <p:cNvGrpSpPr/>
+          <p:nvPr/>
+        </p:nvGrpSpPr>
+        <p:grpSpPr>
+          <a:xfrm>
+            <a:off x="597408" y="6438900"/>
+            <a:ext cx="10997184" cy="234696"/>
+            <a:chOff x="597408" y="6438900"/>
+            <a:chExt cx="10997184" cy="234696"/>
+          </a:xfrm>
+        </p:grpSpPr>
+        <p:sp>
+          <p:nvSpPr>
+            <p:cNvPr id="60" name="TextBox 60"/>
+            <p:cNvSpPr txBox="1"/>
+            <p:nvPr/>
+          </p:nvSpPr>
+          <p:spPr>
+            <a:xfrm>
+              <a:off x="597408" y="6438900"/>
+              <a:ext cx="5147159" cy="234696"/>
+            </a:xfrm>
+            <a:prstGeom prst="rect">
+              <a:avLst/>
+            </a:prstGeom>
+            <a:noFill/>
+            <a:ln>
+              <a:noFill/>
+            </a:ln>
+          </p:spPr>
+          <p:txBody>
+            <a:bodyPr wrap="none" lIns="0" tIns="0" rIns="0" bIns="0" anchor="t" anchorCtr="0">
+              <a:spAutoFit/>
+            </a:bodyPr>
+            <a:lstStyle/>
+            <a:p>
+              <a:pPr algn="l"/>
+              <a:r>
+                <a:rPr lang="zh-CN" sz="1200" dirty="0">
+                  <a:solidFill>
+                    <a:srgbClr val="5A6472"/>
+                  </a:solidFill>
+                  <a:latin typeface="Arial"/>
+                  <a:ea typeface="Microsoft YaHei"/>
+                  <a:cs typeface="Arial"/>
+                </a:rPr>
+                <a:t>数据来源：项目内部修复记录与评测日志（2026-09-21 至 2026-10-10）</a:t>
+              </a:r>
+            </a:p>
+          </p:txBody>
+        </p:sp>
+        <p:sp>
+          <p:nvSpPr>
+            <p:cNvPr id="61" name="TextBox 61"/>
+            <p:cNvSpPr txBox="1"/>
+            <p:nvPr/>
+          </p:nvSpPr>
+          <p:spPr>
+            <a:xfrm>
+              <a:off x="11088366" y="6438900"/>
+              <a:ext cx="506226" cy="234696"/>
             </a:xfrm>
             <a:prstGeom prst="rect">
               <a:avLst/>
@@ -6645,15 +8668,15 @@
             <a:p>
               <a:pPr algn="r"/>
               <a:r>
-                <a:rPr lang="zh-CN" sz="1200" dirty="0">
-                  <a:solidFill>
-                    <a:schemeClr val="accent5"/>
-                  </a:solidFill>
-                  <a:latin typeface="+mn-lt"/>
-                  <a:ea typeface="+mn-ea"/>
-                  <a:cs typeface="+mn-cs"/>
-                </a:rPr>
-                <a:t>03 / 03</a:t>
+                <a:rPr lang="en-US" sz="1200" dirty="0">
+                  <a:solidFill>
+                    <a:srgbClr val="5A6472"/>
+                  </a:solidFill>
+                  <a:latin typeface="Arial"/>
+                  <a:ea typeface="Arial"/>
+                  <a:cs typeface="Arial"/>
+                </a:rPr>
+                <a:t>04 / 04</a:t>
               </a:r>
             </a:p>
           </p:txBody>
@@ -6664,7 +8687,7 @@
   <p:clrMapOvr>
     <a:masterClrMapping/>
   </p:clrMapOvr>
-  <p:transition xmlns:p14="http://schemas.microsoft.com/office/powerpoint/2010/main" p14:dur="400">
+  <p:transition p14:dur="400">
     <p:fade/>
   </p:transition>
 </p:sld>
